--- a/Dify/Dify.pptx
+++ b/Dify/Dify.pptx
@@ -726,13 +726,13 @@
               </a:ext>
             </a:extLst>
           </a:blip>
-          <a:srcRect t="32120" b="35596"/>
+          <a:srcRect t="32120" r="60486" b="35596"/>
           <a:stretch/>
         </p:blipFill>
         <p:spPr bwMode="auto">
           <a:xfrm>
-            <a:off x="870657" y="491707"/>
-            <a:ext cx="4945685" cy="838252"/>
+            <a:off x="677788" y="478575"/>
+            <a:ext cx="1954255" cy="838252"/>
           </a:xfrm>
           <a:prstGeom prst="rect">
             <a:avLst/>
@@ -772,7 +772,7 @@
         </p:blipFill>
         <p:spPr>
           <a:xfrm>
-            <a:off x="7724149" y="4560493"/>
+            <a:off x="7563895" y="4560493"/>
             <a:ext cx="999241" cy="1031475"/>
           </a:xfrm>
           <a:prstGeom prst="rect">
@@ -794,7 +794,7 @@
         </p:nvSpPr>
         <p:spPr>
           <a:xfrm>
-            <a:off x="7187273" y="5699300"/>
+            <a:off x="7027019" y="5699300"/>
             <a:ext cx="2331076" cy="923330"/>
           </a:xfrm>
           <a:prstGeom prst="rect">
@@ -853,8 +853,8 @@
         </p:nvSpPr>
         <p:spPr>
           <a:xfrm>
-            <a:off x="585814" y="395923"/>
-            <a:ext cx="5353071" cy="3230322"/>
+            <a:off x="425560" y="395923"/>
+            <a:ext cx="6906086" cy="3230322"/>
           </a:xfrm>
           <a:prstGeom prst="roundRect">
             <a:avLst/>
@@ -912,7 +912,7 @@
         </p:nvSpPr>
         <p:spPr>
           <a:xfrm>
-            <a:off x="7025205" y="4380386"/>
+            <a:off x="6864951" y="4380386"/>
             <a:ext cx="2493144" cy="2072119"/>
           </a:xfrm>
           <a:prstGeom prst="roundRect">
@@ -971,7 +971,7 @@
         </p:nvSpPr>
         <p:spPr>
           <a:xfrm>
-            <a:off x="767484" y="4578715"/>
+            <a:off x="3784062" y="4578715"/>
             <a:ext cx="2129804" cy="523220"/>
           </a:xfrm>
           <a:prstGeom prst="rect">
@@ -1015,7 +1015,7 @@
         </p:nvSpPr>
         <p:spPr>
           <a:xfrm>
-            <a:off x="958277" y="5315555"/>
+            <a:off x="3974855" y="5315555"/>
             <a:ext cx="1748218" cy="923330"/>
           </a:xfrm>
           <a:prstGeom prst="rect">
@@ -1065,7 +1065,7 @@
         </p:nvSpPr>
         <p:spPr>
           <a:xfrm>
-            <a:off x="585814" y="4380386"/>
+            <a:off x="3730183" y="4380386"/>
             <a:ext cx="2493144" cy="2072119"/>
           </a:xfrm>
           <a:prstGeom prst="roundRect">
@@ -1124,7 +1124,7 @@
         </p:nvSpPr>
         <p:spPr>
           <a:xfrm>
-            <a:off x="1289351" y="1572030"/>
+            <a:off x="803375" y="2449273"/>
             <a:ext cx="2132727" cy="369332"/>
           </a:xfrm>
           <a:prstGeom prst="rect">
@@ -1168,8 +1168,8 @@
         </p:nvCxnSpPr>
         <p:spPr>
           <a:xfrm>
-            <a:off x="585814" y="1436769"/>
-            <a:ext cx="5347692" cy="13974"/>
+            <a:off x="442177" y="2257035"/>
+            <a:ext cx="2885488" cy="0"/>
           </a:xfrm>
           <a:prstGeom prst="line">
             <a:avLst/>
@@ -1221,8 +1221,8 @@
         </p:nvSpPr>
         <p:spPr>
           <a:xfrm>
-            <a:off x="870657" y="2025592"/>
-            <a:ext cx="3209416" cy="369332"/>
+            <a:off x="542096" y="2968722"/>
+            <a:ext cx="2795285" cy="369332"/>
           </a:xfrm>
           <a:prstGeom prst="rect">
             <a:avLst/>
@@ -1267,13 +1267,14 @@
           </p:cNvPr>
           <p:cNvCxnSpPr>
             <a:cxnSpLocks/>
+            <a:endCxn id="7" idx="0"/>
           </p:cNvCxnSpPr>
           <p:nvPr/>
         </p:nvCxnSpPr>
         <p:spPr>
           <a:xfrm>
-            <a:off x="5084540" y="3626246"/>
-            <a:ext cx="0" cy="433631"/>
+            <a:off x="4976755" y="3626245"/>
+            <a:ext cx="0" cy="754141"/>
           </a:xfrm>
           <a:prstGeom prst="line">
             <a:avLst/>
@@ -1325,7 +1326,7 @@
         </p:nvCxnSpPr>
         <p:spPr>
           <a:xfrm>
-            <a:off x="1730169" y="4059877"/>
+            <a:off x="1569915" y="4059877"/>
             <a:ext cx="0" cy="320509"/>
           </a:xfrm>
           <a:prstGeom prst="line">
@@ -1378,7 +1379,7 @@
         </p:nvCxnSpPr>
         <p:spPr>
           <a:xfrm>
-            <a:off x="8245662" y="4059877"/>
+            <a:off x="8085408" y="4059877"/>
             <a:ext cx="0" cy="320509"/>
           </a:xfrm>
           <a:prstGeom prst="line">
@@ -1431,7 +1432,7 @@
         </p:nvCxnSpPr>
         <p:spPr>
           <a:xfrm>
-            <a:off x="1730169" y="4059877"/>
+            <a:off x="1569915" y="4059877"/>
             <a:ext cx="6515493" cy="0"/>
           </a:xfrm>
           <a:prstGeom prst="line">
@@ -1483,9 +1484,9 @@
           <p:nvPr/>
         </p:nvCxnSpPr>
         <p:spPr>
-          <a:xfrm>
-            <a:off x="585814" y="2479836"/>
-            <a:ext cx="5347692" cy="0"/>
+          <a:xfrm flipV="1">
+            <a:off x="5234728" y="378547"/>
+            <a:ext cx="0" cy="3230322"/>
           </a:xfrm>
           <a:prstGeom prst="line">
             <a:avLst/>
@@ -1536,7 +1537,7 @@
         </p:nvSpPr>
         <p:spPr>
           <a:xfrm>
-            <a:off x="7025205" y="395923"/>
+            <a:off x="542097" y="4380386"/>
             <a:ext cx="2493144" cy="2081691"/>
           </a:xfrm>
           <a:prstGeom prst="roundRect">
@@ -1581,25 +1582,382 @@
           </a:p>
         </p:txBody>
       </p:sp>
+      <p:sp>
+        <p:nvSpPr>
+          <p:cNvPr id="27" name="AutoShape 2">
+            <a:extLst>
+              <a:ext uri="{FF2B5EF4-FFF2-40B4-BE49-F238E27FC236}">
+                <a16:creationId xmlns:a16="http://schemas.microsoft.com/office/drawing/2014/main" id="{173FBE5D-E530-E3A4-A6AD-35F9D99E97BF}"/>
+              </a:ext>
+            </a:extLst>
+          </p:cNvPr>
+          <p:cNvSpPr>
+            <a:spLocks noChangeAspect="1" noChangeArrowheads="1"/>
+          </p:cNvSpPr>
+          <p:nvPr/>
+        </p:nvSpPr>
+        <p:spPr bwMode="auto">
+          <a:xfrm>
+            <a:off x="4640346" y="3276600"/>
+            <a:ext cx="304800" cy="304800"/>
+          </a:xfrm>
+          <a:prstGeom prst="rect">
+            <a:avLst/>
+          </a:prstGeom>
+          <a:noFill/>
+          <a:extLst>
+            <a:ext uri="{909E8E84-426E-40DD-AFC4-6F175D3DCCD1}">
+              <a14:hiddenFill xmlns:a14="http://schemas.microsoft.com/office/drawing/2010/main">
+                <a:solidFill>
+                  <a:srgbClr val="FFFFFF"/>
+                </a:solidFill>
+              </a14:hiddenFill>
+            </a:ext>
+          </a:extLst>
+        </p:spPr>
+        <p:txBody>
+          <a:bodyPr vert="horz" wrap="square" lIns="91440" tIns="45720" rIns="91440" bIns="45720" numCol="1" anchor="t" anchorCtr="0" compatLnSpc="1">
+            <a:prstTxWarp prst="textNoShape">
+              <a:avLst/>
+            </a:prstTxWarp>
+          </a:bodyPr>
+          <a:lstStyle/>
+          <a:p>
+            <a:endParaRPr lang="ja-JP" altLang="en-US"/>
+          </a:p>
+        </p:txBody>
+      </p:sp>
+      <p:pic>
+        <p:nvPicPr>
+          <p:cNvPr id="29" name="図 28">
+            <a:extLst>
+              <a:ext uri="{FF2B5EF4-FFF2-40B4-BE49-F238E27FC236}">
+                <a16:creationId xmlns:a16="http://schemas.microsoft.com/office/drawing/2014/main" id="{2DC853CD-84EE-3E6F-5C1F-9553C1F3FFF1}"/>
+              </a:ext>
+            </a:extLst>
+          </p:cNvPr>
+          <p:cNvPicPr>
+            <a:picLocks noChangeAspect="1"/>
+          </p:cNvPicPr>
+          <p:nvPr/>
+        </p:nvPicPr>
+        <p:blipFill>
+          <a:blip r:embed="rId7">
+            <a:extLst>
+              <a:ext uri="{28A0092B-C50C-407E-A947-70E740481C1C}">
+                <a14:useLocalDpi xmlns:a14="http://schemas.microsoft.com/office/drawing/2010/main" val="0"/>
+              </a:ext>
+            </a:extLst>
+          </a:blip>
+          <a:srcRect l="24198" r="20510"/>
+          <a:stretch/>
+        </p:blipFill>
+        <p:spPr>
+          <a:xfrm>
+            <a:off x="775152" y="4536497"/>
+            <a:ext cx="818171" cy="832357"/>
+          </a:xfrm>
+          <a:prstGeom prst="rect">
+            <a:avLst/>
+          </a:prstGeom>
+        </p:spPr>
+      </p:pic>
+      <p:sp>
+        <p:nvSpPr>
+          <p:cNvPr id="30" name="テキスト ボックス 29">
+            <a:extLst>
+              <a:ext uri="{FF2B5EF4-FFF2-40B4-BE49-F238E27FC236}">
+                <a16:creationId xmlns:a16="http://schemas.microsoft.com/office/drawing/2014/main" id="{9AF7D9C6-0905-3235-AD26-99EB5B5EC3B5}"/>
+              </a:ext>
+            </a:extLst>
+          </p:cNvPr>
+          <p:cNvSpPr txBox="1"/>
+          <p:nvPr/>
+        </p:nvSpPr>
+        <p:spPr>
+          <a:xfrm>
+            <a:off x="1593324" y="4768009"/>
+            <a:ext cx="1051226" cy="369332"/>
+          </a:xfrm>
+          <a:prstGeom prst="rect">
+            <a:avLst/>
+          </a:prstGeom>
+          <a:noFill/>
+        </p:spPr>
+        <p:txBody>
+          <a:bodyPr wrap="square">
+            <a:spAutoFit/>
+          </a:bodyPr>
+          <a:lstStyle/>
+          <a:p>
+            <a:r>
+              <a:rPr lang="en-US" altLang="ja-JP" b="1" i="0" dirty="0">
+                <a:solidFill>
+                  <a:srgbClr val="141D2E"/>
+                </a:solidFill>
+                <a:effectLst/>
+                <a:latin typeface="__Inter_a923d8"/>
+              </a:rPr>
+              <a:t>GEMINI</a:t>
+            </a:r>
+            <a:endParaRPr lang="ja-JP" altLang="en-US" dirty="0"/>
+          </a:p>
+        </p:txBody>
+      </p:sp>
+      <p:sp>
+        <p:nvSpPr>
+          <p:cNvPr id="31" name="テキスト ボックス 30">
+            <a:extLst>
+              <a:ext uri="{FF2B5EF4-FFF2-40B4-BE49-F238E27FC236}">
+                <a16:creationId xmlns:a16="http://schemas.microsoft.com/office/drawing/2014/main" id="{DA37AEDB-8ED0-446C-0102-7404F73F88E9}"/>
+              </a:ext>
+            </a:extLst>
+          </p:cNvPr>
+          <p:cNvSpPr txBox="1"/>
+          <p:nvPr/>
+        </p:nvSpPr>
+        <p:spPr>
+          <a:xfrm>
+            <a:off x="907676" y="5495508"/>
+            <a:ext cx="1756982" cy="646331"/>
+          </a:xfrm>
+          <a:prstGeom prst="rect">
+            <a:avLst/>
+          </a:prstGeom>
+          <a:noFill/>
+        </p:spPr>
+        <p:txBody>
+          <a:bodyPr wrap="square">
+            <a:spAutoFit/>
+          </a:bodyPr>
+          <a:lstStyle/>
+          <a:p>
+            <a:pPr algn="ctr"/>
+            <a:r>
+              <a:rPr lang="en-US" altLang="ja-JP" dirty="0"/>
+              <a:t>API</a:t>
+            </a:r>
+            <a:r>
+              <a:rPr lang="ja-JP" altLang="en-US" dirty="0"/>
+              <a:t>接続可能な</a:t>
+            </a:r>
+            <a:endParaRPr lang="en-US" altLang="ja-JP" dirty="0"/>
+          </a:p>
+          <a:p>
+            <a:pPr algn="ctr"/>
+            <a:r>
+              <a:rPr lang="ja-JP" altLang="en-US" dirty="0"/>
+              <a:t>ＡＩ群</a:t>
+            </a:r>
+          </a:p>
+        </p:txBody>
+      </p:sp>
+      <p:pic>
+        <p:nvPicPr>
+          <p:cNvPr id="33" name="図 32">
+            <a:extLst>
+              <a:ext uri="{FF2B5EF4-FFF2-40B4-BE49-F238E27FC236}">
+                <a16:creationId xmlns:a16="http://schemas.microsoft.com/office/drawing/2014/main" id="{D27CCB1D-2FE7-8297-F1F3-793388FC389C}"/>
+              </a:ext>
+            </a:extLst>
+          </p:cNvPr>
+          <p:cNvPicPr>
+            <a:picLocks noChangeAspect="1"/>
+          </p:cNvPicPr>
+          <p:nvPr/>
+        </p:nvPicPr>
+        <p:blipFill>
+          <a:blip r:embed="rId8"/>
+          <a:srcRect t="13302" r="54414" b="13343"/>
+          <a:stretch/>
+        </p:blipFill>
+        <p:spPr>
+          <a:xfrm>
+            <a:off x="5338425" y="918507"/>
+            <a:ext cx="1906434" cy="796640"/>
+          </a:xfrm>
+          <a:prstGeom prst="rect">
+            <a:avLst/>
+          </a:prstGeom>
+        </p:spPr>
+      </p:pic>
+      <p:pic>
+        <p:nvPicPr>
+          <p:cNvPr id="35" name="図 34">
+            <a:extLst>
+              <a:ext uri="{FF2B5EF4-FFF2-40B4-BE49-F238E27FC236}">
+                <a16:creationId xmlns:a16="http://schemas.microsoft.com/office/drawing/2014/main" id="{FC6560B3-7FC4-AC5F-FA81-349DC42767A4}"/>
+              </a:ext>
+            </a:extLst>
+          </p:cNvPr>
+          <p:cNvPicPr>
+            <a:picLocks noChangeAspect="1"/>
+          </p:cNvPicPr>
+          <p:nvPr/>
+        </p:nvPicPr>
+        <p:blipFill>
+          <a:blip r:embed="rId9"/>
+          <a:srcRect t="7606" b="17051"/>
+          <a:stretch/>
+        </p:blipFill>
+        <p:spPr>
+          <a:xfrm>
+            <a:off x="3035241" y="906464"/>
+            <a:ext cx="2095792" cy="832572"/>
+          </a:xfrm>
+          <a:prstGeom prst="rect">
+            <a:avLst/>
+          </a:prstGeom>
+        </p:spPr>
+      </p:pic>
+      <p:pic>
+        <p:nvPicPr>
+          <p:cNvPr id="20" name="図 19">
+            <a:extLst>
+              <a:ext uri="{FF2B5EF4-FFF2-40B4-BE49-F238E27FC236}">
+                <a16:creationId xmlns:a16="http://schemas.microsoft.com/office/drawing/2014/main" id="{B3548D81-8494-CCFF-4681-E505A58ECA3E}"/>
+              </a:ext>
+            </a:extLst>
+          </p:cNvPr>
+          <p:cNvPicPr>
+            <a:picLocks noChangeAspect="1"/>
+          </p:cNvPicPr>
+          <p:nvPr/>
+        </p:nvPicPr>
+        <p:blipFill>
+          <a:blip r:embed="rId8"/>
+          <a:srcRect l="52082" t="13302" r="2239" b="13343"/>
+          <a:stretch/>
+        </p:blipFill>
+        <p:spPr>
+          <a:xfrm>
+            <a:off x="5388905" y="2232371"/>
+            <a:ext cx="1910319" cy="796640"/>
+          </a:xfrm>
+          <a:prstGeom prst="rect">
+            <a:avLst/>
+          </a:prstGeom>
+        </p:spPr>
+      </p:pic>
+      <p:pic>
+        <p:nvPicPr>
+          <p:cNvPr id="26" name="Picture 5">
+            <a:extLst>
+              <a:ext uri="{FF2B5EF4-FFF2-40B4-BE49-F238E27FC236}">
+                <a16:creationId xmlns:a16="http://schemas.microsoft.com/office/drawing/2014/main" id="{DE881740-CB83-BB23-AACD-220A93D6E86A}"/>
+              </a:ext>
+            </a:extLst>
+          </p:cNvPr>
+          <p:cNvPicPr>
+            <a:picLocks noChangeAspect="1" noChangeArrowheads="1"/>
+          </p:cNvPicPr>
+          <p:nvPr/>
+        </p:nvPicPr>
+        <p:blipFill rotWithShape="1">
+          <a:blip r:embed="rId2">
+            <a:extLst>
+              <a:ext uri="{28A0092B-C50C-407E-A947-70E740481C1C}">
+                <a14:useLocalDpi xmlns:a14="http://schemas.microsoft.com/office/drawing/2010/main" val="0"/>
+              </a:ext>
+            </a:extLst>
+          </a:blip>
+          <a:srcRect l="43516" t="32120" r="4829" b="35596"/>
+          <a:stretch/>
+        </p:blipFill>
+        <p:spPr bwMode="auto">
+          <a:xfrm>
+            <a:off x="566243" y="1290755"/>
+            <a:ext cx="2554660" cy="838252"/>
+          </a:xfrm>
+          <a:prstGeom prst="rect">
+            <a:avLst/>
+          </a:prstGeom>
+          <a:noFill/>
+          <a:extLst>
+            <a:ext uri="{909E8E84-426E-40DD-AFC4-6F175D3DCCD1}">
+              <a14:hiddenFill xmlns:a14="http://schemas.microsoft.com/office/drawing/2010/main">
+                <a:solidFill>
+                  <a:srgbClr val="FFFFFF"/>
+                </a:solidFill>
+              </a14:hiddenFill>
+            </a:ext>
+          </a:extLst>
+        </p:spPr>
+      </p:pic>
       <p:cxnSp>
         <p:nvCxnSpPr>
-          <p:cNvPr id="24" name="直線コネクタ 23">
-            <a:extLst>
-              <a:ext uri="{FF2B5EF4-FFF2-40B4-BE49-F238E27FC236}">
-                <a16:creationId xmlns:a16="http://schemas.microsoft.com/office/drawing/2014/main" id="{595496DE-2940-6CBF-FF7A-1165771D84DF}"/>
+          <p:cNvPr id="34" name="直線コネクタ 33">
+            <a:extLst>
+              <a:ext uri="{FF2B5EF4-FFF2-40B4-BE49-F238E27FC236}">
+                <a16:creationId xmlns:a16="http://schemas.microsoft.com/office/drawing/2014/main" id="{F5AC6671-0FF9-57DF-EC20-06454BA2A4F8}"/>
               </a:ext>
             </a:extLst>
           </p:cNvPr>
           <p:cNvCxnSpPr>
             <a:cxnSpLocks/>
-            <a:endCxn id="23" idx="1"/>
           </p:cNvCxnSpPr>
           <p:nvPr/>
         </p:nvCxnSpPr>
         <p:spPr>
+          <a:xfrm>
+            <a:off x="3337381" y="2257035"/>
+            <a:ext cx="0" cy="1351834"/>
+          </a:xfrm>
+          <a:prstGeom prst="line">
+            <a:avLst/>
+          </a:prstGeom>
+          <a:noFill/>
+          <a:ln w="38100">
+            <a:solidFill>
+              <a:schemeClr val="tx1"/>
+            </a:solidFill>
+            <a:prstDash val="dash"/>
+          </a:ln>
+          <a:effectLst>
+            <a:outerShdw blurRad="50800" dist="38100" dir="2700000" algn="tl" rotWithShape="0">
+              <a:prstClr val="black">
+                <a:alpha val="40000"/>
+              </a:prstClr>
+            </a:outerShdw>
+          </a:effectLst>
+        </p:spPr>
+        <p:style>
+          <a:lnRef idx="2">
+            <a:schemeClr val="accent1">
+              <a:shade val="15000"/>
+            </a:schemeClr>
+          </a:lnRef>
+          <a:fillRef idx="1">
+            <a:schemeClr val="accent1"/>
+          </a:fillRef>
+          <a:effectRef idx="0">
+            <a:schemeClr val="accent1"/>
+          </a:effectRef>
+          <a:fontRef idx="minor">
+            <a:schemeClr val="lt1"/>
+          </a:fontRef>
+        </p:style>
+      </p:cxnSp>
+      <p:cxnSp>
+        <p:nvCxnSpPr>
+          <p:cNvPr id="38" name="直線コネクタ 37">
+            <a:extLst>
+              <a:ext uri="{FF2B5EF4-FFF2-40B4-BE49-F238E27FC236}">
+                <a16:creationId xmlns:a16="http://schemas.microsoft.com/office/drawing/2014/main" id="{73F9CFA5-F3C5-7E11-E33A-5D3F7027D7E8}"/>
+              </a:ext>
+            </a:extLst>
+          </p:cNvPr>
+          <p:cNvCxnSpPr>
+            <a:cxnSpLocks/>
+            <a:stCxn id="13" idx="3"/>
+            <a:endCxn id="52" idx="1"/>
+          </p:cNvCxnSpPr>
+          <p:nvPr/>
+        </p:nvCxnSpPr>
+        <p:spPr>
           <a:xfrm flipV="1">
-            <a:off x="5933506" y="1436769"/>
-            <a:ext cx="1091699" cy="3561"/>
+            <a:off x="7331646" y="2007182"/>
+            <a:ext cx="503490" cy="3902"/>
           </a:xfrm>
           <a:prstGeom prst="line">
             <a:avLst/>
@@ -1635,57 +1993,12 @@
           </a:fontRef>
         </p:style>
       </p:cxnSp>
-      <p:sp>
-        <p:nvSpPr>
-          <p:cNvPr id="27" name="AutoShape 2">
-            <a:extLst>
-              <a:ext uri="{FF2B5EF4-FFF2-40B4-BE49-F238E27FC236}">
-                <a16:creationId xmlns:a16="http://schemas.microsoft.com/office/drawing/2014/main" id="{173FBE5D-E530-E3A4-A6AD-35F9D99E97BF}"/>
-              </a:ext>
-            </a:extLst>
-          </p:cNvPr>
-          <p:cNvSpPr>
-            <a:spLocks noChangeAspect="1" noChangeArrowheads="1"/>
-          </p:cNvSpPr>
-          <p:nvPr/>
-        </p:nvSpPr>
-        <p:spPr bwMode="auto">
-          <a:xfrm>
-            <a:off x="4800600" y="3276600"/>
-            <a:ext cx="304800" cy="304800"/>
-          </a:xfrm>
-          <a:prstGeom prst="rect">
-            <a:avLst/>
-          </a:prstGeom>
-          <a:noFill/>
-          <a:extLst>
-            <a:ext uri="{909E8E84-426E-40DD-AFC4-6F175D3DCCD1}">
-              <a14:hiddenFill xmlns:a14="http://schemas.microsoft.com/office/drawing/2010/main">
-                <a:solidFill>
-                  <a:srgbClr val="FFFFFF"/>
-                </a:solidFill>
-              </a14:hiddenFill>
-            </a:ext>
-          </a:extLst>
-        </p:spPr>
-        <p:txBody>
-          <a:bodyPr vert="horz" wrap="square" lIns="91440" tIns="45720" rIns="91440" bIns="45720" numCol="1" anchor="t" anchorCtr="0" compatLnSpc="1">
-            <a:prstTxWarp prst="textNoShape">
-              <a:avLst/>
-            </a:prstTxWarp>
-          </a:bodyPr>
-          <a:lstStyle/>
-          <a:p>
-            <a:endParaRPr lang="ja-JP" altLang="en-US"/>
-          </a:p>
-        </p:txBody>
-      </p:sp>
       <p:pic>
         <p:nvPicPr>
-          <p:cNvPr id="29" name="図 28">
-            <a:extLst>
-              <a:ext uri="{FF2B5EF4-FFF2-40B4-BE49-F238E27FC236}">
-                <a16:creationId xmlns:a16="http://schemas.microsoft.com/office/drawing/2014/main" id="{2DC853CD-84EE-3E6F-5C1F-9553C1F3FFF1}"/>
+          <p:cNvPr id="45" name="図 44">
+            <a:extLst>
+              <a:ext uri="{FF2B5EF4-FFF2-40B4-BE49-F238E27FC236}">
+                <a16:creationId xmlns:a16="http://schemas.microsoft.com/office/drawing/2014/main" id="{D23C54C6-E21B-01B4-6FFA-B7BA06E69D0E}"/>
               </a:ext>
             </a:extLst>
           </p:cNvPr>
@@ -1695,20 +2008,75 @@
           <p:nvPr/>
         </p:nvPicPr>
         <p:blipFill>
-          <a:blip r:embed="rId7">
-            <a:extLst>
-              <a:ext uri="{28A0092B-C50C-407E-A947-70E740481C1C}">
-                <a14:useLocalDpi xmlns:a14="http://schemas.microsoft.com/office/drawing/2010/main" val="0"/>
-              </a:ext>
-            </a:extLst>
-          </a:blip>
-          <a:srcRect l="24198" r="20510"/>
-          <a:stretch/>
+          <a:blip r:embed="rId10"/>
+          <a:stretch>
+            <a:fillRect/>
+          </a:stretch>
         </p:blipFill>
         <p:spPr>
           <a:xfrm>
-            <a:off x="7258260" y="552034"/>
-            <a:ext cx="818171" cy="832357"/>
+            <a:off x="8162183" y="2650511"/>
+            <a:ext cx="879484" cy="896078"/>
+          </a:xfrm>
+          <a:prstGeom prst="rect">
+            <a:avLst/>
+          </a:prstGeom>
+        </p:spPr>
+      </p:pic>
+      <p:pic>
+        <p:nvPicPr>
+          <p:cNvPr id="47" name="図 46">
+            <a:extLst>
+              <a:ext uri="{FF2B5EF4-FFF2-40B4-BE49-F238E27FC236}">
+                <a16:creationId xmlns:a16="http://schemas.microsoft.com/office/drawing/2014/main" id="{E3BEA9CF-1941-9439-8D6F-D6388056CBEB}"/>
+              </a:ext>
+            </a:extLst>
+          </p:cNvPr>
+          <p:cNvPicPr>
+            <a:picLocks noChangeAspect="1"/>
+          </p:cNvPicPr>
+          <p:nvPr/>
+        </p:nvPicPr>
+        <p:blipFill>
+          <a:blip r:embed="rId11"/>
+          <a:stretch>
+            <a:fillRect/>
+          </a:stretch>
+        </p:blipFill>
+        <p:spPr>
+          <a:xfrm>
+            <a:off x="7914064" y="1252258"/>
+            <a:ext cx="1457528" cy="371527"/>
+          </a:xfrm>
+          <a:prstGeom prst="rect">
+            <a:avLst/>
+          </a:prstGeom>
+        </p:spPr>
+      </p:pic>
+      <p:pic>
+        <p:nvPicPr>
+          <p:cNvPr id="51" name="図 50">
+            <a:extLst>
+              <a:ext uri="{FF2B5EF4-FFF2-40B4-BE49-F238E27FC236}">
+                <a16:creationId xmlns:a16="http://schemas.microsoft.com/office/drawing/2014/main" id="{7690F083-0248-B654-5C81-1FA10FA2B30C}"/>
+              </a:ext>
+            </a:extLst>
+          </p:cNvPr>
+          <p:cNvPicPr>
+            <a:picLocks noChangeAspect="1"/>
+          </p:cNvPicPr>
+          <p:nvPr/>
+        </p:nvPicPr>
+        <p:blipFill>
+          <a:blip r:embed="rId12"/>
+          <a:stretch>
+            <a:fillRect/>
+          </a:stretch>
+        </p:blipFill>
+        <p:spPr>
+          <a:xfrm>
+            <a:off x="8257011" y="1803892"/>
+            <a:ext cx="771633" cy="752580"/>
           </a:xfrm>
           <a:prstGeom prst="rect">
             <a:avLst/>
@@ -1717,10 +2085,69 @@
       </p:pic>
       <p:sp>
         <p:nvSpPr>
-          <p:cNvPr id="30" name="テキスト ボックス 29">
-            <a:extLst>
-              <a:ext uri="{FF2B5EF4-FFF2-40B4-BE49-F238E27FC236}">
-                <a16:creationId xmlns:a16="http://schemas.microsoft.com/office/drawing/2014/main" id="{9AF7D9C6-0905-3235-AD26-99EB5B5EC3B5}"/>
+          <p:cNvPr id="52" name="四角形: 角を丸くする 51">
+            <a:extLst>
+              <a:ext uri="{FF2B5EF4-FFF2-40B4-BE49-F238E27FC236}">
+                <a16:creationId xmlns:a16="http://schemas.microsoft.com/office/drawing/2014/main" id="{F3BB6454-C4A8-6F91-0209-80AECB6BC8E6}"/>
+              </a:ext>
+            </a:extLst>
+          </p:cNvPr>
+          <p:cNvSpPr/>
+          <p:nvPr/>
+        </p:nvSpPr>
+        <p:spPr>
+          <a:xfrm>
+            <a:off x="7835136" y="378548"/>
+            <a:ext cx="1574164" cy="3257268"/>
+          </a:xfrm>
+          <a:prstGeom prst="roundRect">
+            <a:avLst/>
+          </a:prstGeom>
+          <a:noFill/>
+          <a:ln w="38100">
+            <a:solidFill>
+              <a:schemeClr val="tx1"/>
+            </a:solidFill>
+          </a:ln>
+          <a:effectLst>
+            <a:outerShdw blurRad="50800" dist="38100" dir="2700000" algn="tl" rotWithShape="0">
+              <a:prstClr val="black">
+                <a:alpha val="40000"/>
+              </a:prstClr>
+            </a:outerShdw>
+          </a:effectLst>
+        </p:spPr>
+        <p:style>
+          <a:lnRef idx="2">
+            <a:schemeClr val="accent1">
+              <a:shade val="15000"/>
+            </a:schemeClr>
+          </a:lnRef>
+          <a:fillRef idx="1">
+            <a:schemeClr val="accent1"/>
+          </a:fillRef>
+          <a:effectRef idx="0">
+            <a:schemeClr val="accent1"/>
+          </a:effectRef>
+          <a:fontRef idx="minor">
+            <a:schemeClr val="lt1"/>
+          </a:fontRef>
+        </p:style>
+        <p:txBody>
+          <a:bodyPr rtlCol="0" anchor="ctr"/>
+          <a:lstStyle/>
+          <a:p>
+            <a:pPr algn="ctr"/>
+            <a:endParaRPr kumimoji="1" lang="ja-JP" altLang="en-US"/>
+          </a:p>
+        </p:txBody>
+      </p:sp>
+      <p:sp>
+        <p:nvSpPr>
+          <p:cNvPr id="61" name="テキスト ボックス 60">
+            <a:extLst>
+              <a:ext uri="{FF2B5EF4-FFF2-40B4-BE49-F238E27FC236}">
+                <a16:creationId xmlns:a16="http://schemas.microsoft.com/office/drawing/2014/main" id="{454CD844-CE08-98F5-B903-9EBA631D125A}"/>
               </a:ext>
             </a:extLst>
           </p:cNvPr>
@@ -1729,8 +2156,8 @@
         </p:nvSpPr>
         <p:spPr>
           <a:xfrm>
-            <a:off x="8076432" y="783546"/>
-            <a:ext cx="1051226" cy="369332"/>
+            <a:off x="7997968" y="551651"/>
+            <a:ext cx="1240741" cy="523220"/>
           </a:xfrm>
           <a:prstGeom prst="rect">
             <a:avLst/>
@@ -1743,126 +2170,21 @@
           </a:bodyPr>
           <a:lstStyle/>
           <a:p>
+            <a:pPr algn="ctr"/>
             <a:r>
-              <a:rPr lang="en-US" altLang="ja-JP" b="1" i="0" dirty="0">
+              <a:rPr lang="en-US" altLang="ja-JP" sz="2800" b="1" i="0" dirty="0">
                 <a:solidFill>
                   <a:srgbClr val="141D2E"/>
                 </a:solidFill>
                 <a:effectLst/>
                 <a:latin typeface="__Inter_a923d8"/>
               </a:rPr>
-              <a:t>GEMINI</a:t>
+              <a:t>UI/UX</a:t>
             </a:r>
-            <a:endParaRPr lang="ja-JP" altLang="en-US" dirty="0"/>
+            <a:endParaRPr lang="ja-JP" altLang="en-US" sz="2800" dirty="0"/>
           </a:p>
         </p:txBody>
       </p:sp>
-      <p:sp>
-        <p:nvSpPr>
-          <p:cNvPr id="31" name="テキスト ボックス 30">
-            <a:extLst>
-              <a:ext uri="{FF2B5EF4-FFF2-40B4-BE49-F238E27FC236}">
-                <a16:creationId xmlns:a16="http://schemas.microsoft.com/office/drawing/2014/main" id="{DA37AEDB-8ED0-446C-0102-7404F73F88E9}"/>
-              </a:ext>
-            </a:extLst>
-          </p:cNvPr>
-          <p:cNvSpPr txBox="1"/>
-          <p:nvPr/>
-        </p:nvSpPr>
-        <p:spPr>
-          <a:xfrm>
-            <a:off x="7390784" y="1511045"/>
-            <a:ext cx="1756982" cy="646331"/>
-          </a:xfrm>
-          <a:prstGeom prst="rect">
-            <a:avLst/>
-          </a:prstGeom>
-          <a:noFill/>
-        </p:spPr>
-        <p:txBody>
-          <a:bodyPr wrap="square">
-            <a:spAutoFit/>
-          </a:bodyPr>
-          <a:lstStyle/>
-          <a:p>
-            <a:pPr algn="ctr"/>
-            <a:r>
-              <a:rPr lang="en-US" altLang="ja-JP" dirty="0"/>
-              <a:t>API</a:t>
-            </a:r>
-            <a:r>
-              <a:rPr lang="ja-JP" altLang="en-US" dirty="0"/>
-              <a:t>接続可能な</a:t>
-            </a:r>
-            <a:endParaRPr lang="en-US" altLang="ja-JP" dirty="0"/>
-          </a:p>
-          <a:p>
-            <a:pPr algn="ctr"/>
-            <a:r>
-              <a:rPr lang="ja-JP" altLang="en-US" dirty="0"/>
-              <a:t>ＡＩ群</a:t>
-            </a:r>
-          </a:p>
-        </p:txBody>
-      </p:sp>
-      <p:pic>
-        <p:nvPicPr>
-          <p:cNvPr id="33" name="図 32">
-            <a:extLst>
-              <a:ext uri="{FF2B5EF4-FFF2-40B4-BE49-F238E27FC236}">
-                <a16:creationId xmlns:a16="http://schemas.microsoft.com/office/drawing/2014/main" id="{D27CCB1D-2FE7-8297-F1F3-793388FC389C}"/>
-              </a:ext>
-            </a:extLst>
-          </p:cNvPr>
-          <p:cNvPicPr>
-            <a:picLocks noChangeAspect="1"/>
-          </p:cNvPicPr>
-          <p:nvPr/>
-        </p:nvPicPr>
-        <p:blipFill>
-          <a:blip r:embed="rId8"/>
-          <a:srcRect t="13302" b="13343"/>
-          <a:stretch/>
-        </p:blipFill>
-        <p:spPr>
-          <a:xfrm>
-            <a:off x="1168630" y="2640982"/>
-            <a:ext cx="4182059" cy="796640"/>
-          </a:xfrm>
-          <a:prstGeom prst="rect">
-            <a:avLst/>
-          </a:prstGeom>
-        </p:spPr>
-      </p:pic>
-      <p:pic>
-        <p:nvPicPr>
-          <p:cNvPr id="35" name="図 34">
-            <a:extLst>
-              <a:ext uri="{FF2B5EF4-FFF2-40B4-BE49-F238E27FC236}">
-                <a16:creationId xmlns:a16="http://schemas.microsoft.com/office/drawing/2014/main" id="{FC6560B3-7FC4-AC5F-FA81-349DC42767A4}"/>
-              </a:ext>
-            </a:extLst>
-          </p:cNvPr>
-          <p:cNvPicPr>
-            <a:picLocks noChangeAspect="1"/>
-          </p:cNvPicPr>
-          <p:nvPr/>
-        </p:nvPicPr>
-        <p:blipFill>
-          <a:blip r:embed="rId9"/>
-          <a:srcRect t="7606" b="17051"/>
-          <a:stretch/>
-        </p:blipFill>
-        <p:spPr>
-          <a:xfrm>
-            <a:off x="3792661" y="1551782"/>
-            <a:ext cx="2095792" cy="832572"/>
-          </a:xfrm>
-          <a:prstGeom prst="rect">
-            <a:avLst/>
-          </a:prstGeom>
-        </p:spPr>
-      </p:pic>
     </p:spTree>
     <p:extLst>
       <p:ext uri="{BB962C8B-B14F-4D97-AF65-F5344CB8AC3E}">
